--- a/b_Others/01.pptx
+++ b/b_Others/01.pptx
@@ -266,7 +266,7 @@
           <a:p>
             <a:fld id="{830943F9-8AC6-4393-AEEF-D45C2A43C7C7}" type="datetimeFigureOut">
               <a:rPr lang="LID4096" smtClean="0"/>
-              <a:t>12/20/2024</a:t>
+              <a:t>12/23/2024</a:t>
             </a:fld>
             <a:endParaRPr lang="LID4096"/>
           </a:p>
@@ -466,7 +466,7 @@
           <a:p>
             <a:fld id="{830943F9-8AC6-4393-AEEF-D45C2A43C7C7}" type="datetimeFigureOut">
               <a:rPr lang="LID4096" smtClean="0"/>
-              <a:t>12/20/2024</a:t>
+              <a:t>12/23/2024</a:t>
             </a:fld>
             <a:endParaRPr lang="LID4096"/>
           </a:p>
@@ -676,7 +676,7 @@
           <a:p>
             <a:fld id="{830943F9-8AC6-4393-AEEF-D45C2A43C7C7}" type="datetimeFigureOut">
               <a:rPr lang="LID4096" smtClean="0"/>
-              <a:t>12/20/2024</a:t>
+              <a:t>12/23/2024</a:t>
             </a:fld>
             <a:endParaRPr lang="LID4096"/>
           </a:p>
@@ -876,7 +876,7 @@
           <a:p>
             <a:fld id="{830943F9-8AC6-4393-AEEF-D45C2A43C7C7}" type="datetimeFigureOut">
               <a:rPr lang="LID4096" smtClean="0"/>
-              <a:t>12/20/2024</a:t>
+              <a:t>12/23/2024</a:t>
             </a:fld>
             <a:endParaRPr lang="LID4096"/>
           </a:p>
@@ -1152,7 +1152,7 @@
           <a:p>
             <a:fld id="{830943F9-8AC6-4393-AEEF-D45C2A43C7C7}" type="datetimeFigureOut">
               <a:rPr lang="LID4096" smtClean="0"/>
-              <a:t>12/20/2024</a:t>
+              <a:t>12/23/2024</a:t>
             </a:fld>
             <a:endParaRPr lang="LID4096"/>
           </a:p>
@@ -1420,7 +1420,7 @@
           <a:p>
             <a:fld id="{830943F9-8AC6-4393-AEEF-D45C2A43C7C7}" type="datetimeFigureOut">
               <a:rPr lang="LID4096" smtClean="0"/>
-              <a:t>12/20/2024</a:t>
+              <a:t>12/23/2024</a:t>
             </a:fld>
             <a:endParaRPr lang="LID4096"/>
           </a:p>
@@ -1835,7 +1835,7 @@
           <a:p>
             <a:fld id="{830943F9-8AC6-4393-AEEF-D45C2A43C7C7}" type="datetimeFigureOut">
               <a:rPr lang="LID4096" smtClean="0"/>
-              <a:t>12/20/2024</a:t>
+              <a:t>12/23/2024</a:t>
             </a:fld>
             <a:endParaRPr lang="LID4096"/>
           </a:p>
@@ -1977,7 +1977,7 @@
           <a:p>
             <a:fld id="{830943F9-8AC6-4393-AEEF-D45C2A43C7C7}" type="datetimeFigureOut">
               <a:rPr lang="LID4096" smtClean="0"/>
-              <a:t>12/20/2024</a:t>
+              <a:t>12/23/2024</a:t>
             </a:fld>
             <a:endParaRPr lang="LID4096"/>
           </a:p>
@@ -2090,7 +2090,7 @@
           <a:p>
             <a:fld id="{830943F9-8AC6-4393-AEEF-D45C2A43C7C7}" type="datetimeFigureOut">
               <a:rPr lang="LID4096" smtClean="0"/>
-              <a:t>12/20/2024</a:t>
+              <a:t>12/23/2024</a:t>
             </a:fld>
             <a:endParaRPr lang="LID4096"/>
           </a:p>
@@ -2403,7 +2403,7 @@
           <a:p>
             <a:fld id="{830943F9-8AC6-4393-AEEF-D45C2A43C7C7}" type="datetimeFigureOut">
               <a:rPr lang="LID4096" smtClean="0"/>
-              <a:t>12/20/2024</a:t>
+              <a:t>12/23/2024</a:t>
             </a:fld>
             <a:endParaRPr lang="LID4096"/>
           </a:p>
@@ -2692,7 +2692,7 @@
           <a:p>
             <a:fld id="{830943F9-8AC6-4393-AEEF-D45C2A43C7C7}" type="datetimeFigureOut">
               <a:rPr lang="LID4096" smtClean="0"/>
-              <a:t>12/20/2024</a:t>
+              <a:t>12/23/2024</a:t>
             </a:fld>
             <a:endParaRPr lang="LID4096"/>
           </a:p>
@@ -2935,7 +2935,7 @@
           <a:p>
             <a:fld id="{830943F9-8AC6-4393-AEEF-D45C2A43C7C7}" type="datetimeFigureOut">
               <a:rPr lang="LID4096" smtClean="0"/>
-              <a:t>12/20/2024</a:t>
+              <a:t>12/23/2024</a:t>
             </a:fld>
             <a:endParaRPr lang="LID4096"/>
           </a:p>
@@ -8732,6 +8732,88 @@
           </a:p>
         </p:txBody>
       </p:sp>
+      <p:sp>
+        <p:nvSpPr>
+          <p:cNvPr id="3" name="TextBox 2">
+            <a:extLst>
+              <a:ext uri="{FF2B5EF4-FFF2-40B4-BE49-F238E27FC236}">
+                <a16:creationId xmlns:a16="http://schemas.microsoft.com/office/drawing/2014/main" id="{BCD71EB5-A5DD-4BA5-8723-00738556F9F9}"/>
+              </a:ext>
+            </a:extLst>
+          </p:cNvPr>
+          <p:cNvSpPr txBox="1"/>
+          <p:nvPr/>
+        </p:nvSpPr>
+        <p:spPr>
+          <a:xfrm>
+            <a:off x="482097" y="519768"/>
+            <a:ext cx="6106562" cy="2031325"/>
+          </a:xfrm>
+          <a:prstGeom prst="rect">
+            <a:avLst/>
+          </a:prstGeom>
+          <a:noFill/>
+        </p:spPr>
+        <p:txBody>
+          <a:bodyPr wrap="square">
+            <a:spAutoFit/>
+          </a:bodyPr>
+          <a:lstStyle/>
+          <a:p>
+            <a:pPr algn="ctr"/>
+            <a:r>
+              <a:rPr lang="en-GB" dirty="0"/>
+              <a:t>We just parameterized many recognized sources of model input uncertainty at several spatial and temporal scales. And we expressed spatial and temporal correlation in those parameters. “ </a:t>
+            </a:r>
+          </a:p>
+          <a:p>
+            <a:endParaRPr lang="en-GB" dirty="0"/>
+          </a:p>
+          <a:p>
+            <a:pPr algn="ctr"/>
+            <a:r>
+              <a:rPr lang="en-GB" dirty="0"/>
+              <a:t>One last set of parameters that we will need later for sequential data assimilation - initial conditions:</a:t>
+            </a:r>
+            <a:endParaRPr lang="LID4096" dirty="0"/>
+          </a:p>
+        </p:txBody>
+      </p:sp>
+      <p:sp>
+        <p:nvSpPr>
+          <p:cNvPr id="5" name="TextBox 4">
+            <a:extLst>
+              <a:ext uri="{FF2B5EF4-FFF2-40B4-BE49-F238E27FC236}">
+                <a16:creationId xmlns:a16="http://schemas.microsoft.com/office/drawing/2014/main" id="{1A48191C-61B8-4808-2899-C75090834371}"/>
+              </a:ext>
+            </a:extLst>
+          </p:cNvPr>
+          <p:cNvSpPr txBox="1"/>
+          <p:nvPr/>
+        </p:nvSpPr>
+        <p:spPr>
+          <a:xfrm>
+            <a:off x="181070" y="2996759"/>
+            <a:ext cx="6590922" cy="461665"/>
+          </a:xfrm>
+          <a:prstGeom prst="rect">
+            <a:avLst/>
+          </a:prstGeom>
+          <a:noFill/>
+        </p:spPr>
+        <p:txBody>
+          <a:bodyPr wrap="square">
+            <a:spAutoFit/>
+          </a:bodyPr>
+          <a:lstStyle/>
+          <a:p>
+            <a:r>
+              <a:rPr lang="LID4096" sz="1200" dirty="0"/>
+              <a:t>http://localhost:8888/notebooks/01_GMDSI_____advanced/01_Tutorials___AGAIN___/part2_01_pstfrom______W_in_progress/freyberg_pstfrom_pest_setup_02.ipynb</a:t>
+            </a:r>
+          </a:p>
+        </p:txBody>
+      </p:sp>
     </p:spTree>
     <p:extLst>
       <p:ext uri="{BB962C8B-B14F-4D97-AF65-F5344CB8AC3E}">
